--- a/MLPro/50 - Course_project/Presentation/Course project.pptx
+++ b/MLPro/50 - Course_project/Presentation/Course project.pptx
@@ -128,7 +128,7 @@
           <a:p>
             <a:fld id="{CED1C788-56A1-2E45-A024-5C42A74F7F0E}" type="datetimeFigureOut">
               <a:rPr lang="en-US" smtClean="0"/>
-              <a:t>9/3/25</a:t>
+              <a:t>3/4/26</a:t>
             </a:fld>
             <a:endParaRPr lang="en-US"/>
           </a:p>
@@ -1757,7 +1757,7 @@
           <a:p>
             <a:fld id="{1D8BD707-D9CF-40AE-B4C6-C98DA3205C09}" type="datetimeFigureOut">
               <a:rPr lang="en-US"/>
-              <a:t>9/3/25</a:t>
+              <a:t>3/4/26</a:t>
             </a:fld>
             <a:endParaRPr lang="en-US"/>
           </a:p>
@@ -1934,7 +1934,7 @@
           <a:p>
             <a:fld id="{1D8BD707-D9CF-40AE-B4C6-C98DA3205C09}" type="datetimeFigureOut">
               <a:rPr lang="en-US"/>
-              <a:t>9/3/25</a:t>
+              <a:t>3/4/26</a:t>
             </a:fld>
             <a:endParaRPr lang="en-US"/>
           </a:p>
@@ -2160,7 +2160,7 @@
           <a:p>
             <a:fld id="{1D8BD707-D9CF-40AE-B4C6-C98DA3205C09}" type="datetimeFigureOut">
               <a:rPr lang="en-US"/>
-              <a:t>9/3/25</a:t>
+              <a:t>3/4/26</a:t>
             </a:fld>
             <a:endParaRPr lang="en-US"/>
           </a:p>
@@ -2338,7 +2338,7 @@
           <a:p>
             <a:fld id="{1D8BD707-D9CF-40AE-B4C6-C98DA3205C09}" type="datetimeFigureOut">
               <a:rPr lang="en-US"/>
-              <a:t>9/3/25</a:t>
+              <a:t>3/4/26</a:t>
             </a:fld>
             <a:endParaRPr lang="en-US"/>
           </a:p>
@@ -2457,7 +2457,7 @@
           <a:p>
             <a:fld id="{1D8BD707-D9CF-40AE-B4C6-C98DA3205C09}" type="datetimeFigureOut">
               <a:rPr lang="en-US"/>
-              <a:t>9/3/25</a:t>
+              <a:t>3/4/26</a:t>
             </a:fld>
             <a:endParaRPr lang="en-US"/>
           </a:p>
@@ -4609,7 +4609,7 @@
           <a:p>
             <a:fld id="{1D8BD707-D9CF-40AE-B4C6-C98DA3205C09}" type="datetimeFigureOut">
               <a:rPr lang="en-US"/>
-              <a:t>9/3/25</a:t>
+              <a:t>3/4/26</a:t>
             </a:fld>
             <a:endParaRPr lang="en-US"/>
           </a:p>
@@ -8997,7 +8997,7 @@
                 <a:latin typeface="Calibri"/>
                 <a:cs typeface="Calibri"/>
               </a:rPr>
-              <a:t>03</a:t>
+              <a:t>04</a:t>
             </a:r>
             <a:r>
               <a:rPr sz="1400" dirty="0">
@@ -9027,7 +9027,7 @@
                 <a:latin typeface="Calibri"/>
                 <a:cs typeface="Calibri"/>
               </a:rPr>
-              <a:t>9</a:t>
+              <a:t>3</a:t>
             </a:r>
             <a:r>
               <a:rPr sz="1400" spc="-40" dirty="0">
@@ -9090,13 +9090,19 @@
             </a:pPr>
             <a:r>
               <a:rPr lang="ru-RU" sz="1400" dirty="0">
+                <a:solidFill>
+                  <a:srgbClr val="FF0000"/>
+                </a:solidFill>
                 <a:latin typeface="Calibri"/>
                 <a:cs typeface="Calibri"/>
               </a:rPr>
-              <a:t>09</a:t>
+              <a:t>25</a:t>
             </a:r>
             <a:r>
               <a:rPr sz="1400" dirty="0">
+                <a:solidFill>
+                  <a:srgbClr val="FF0000"/>
+                </a:solidFill>
                 <a:latin typeface="Calibri"/>
                 <a:cs typeface="Calibri"/>
               </a:rPr>
@@ -9104,6 +9110,9 @@
             </a:r>
             <a:r>
               <a:rPr lang="en-US" sz="1400" dirty="0">
+                <a:solidFill>
+                  <a:srgbClr val="FF0000"/>
+                </a:solidFill>
                 <a:latin typeface="Calibri"/>
                 <a:cs typeface="Calibri"/>
               </a:rPr>
@@ -9111,13 +9120,19 @@
             </a:r>
             <a:r>
               <a:rPr lang="ru-RU" sz="1400" dirty="0">
+                <a:solidFill>
+                  <a:srgbClr val="FF0000"/>
+                </a:solidFill>
                 <a:latin typeface="Calibri"/>
                 <a:cs typeface="Calibri"/>
               </a:rPr>
-              <a:t>9</a:t>
+              <a:t>3</a:t>
             </a:r>
             <a:r>
               <a:rPr sz="1400" spc="-35" dirty="0">
+                <a:solidFill>
+                  <a:srgbClr val="FF0000"/>
+                </a:solidFill>
                 <a:latin typeface="Calibri"/>
                 <a:cs typeface="Calibri"/>
               </a:rPr>
@@ -9125,12 +9140,18 @@
             </a:r>
             <a:r>
               <a:rPr sz="1400" spc="-50" dirty="0">
+                <a:solidFill>
+                  <a:srgbClr val="FF0000"/>
+                </a:solidFill>
                 <a:latin typeface="Calibri"/>
                 <a:cs typeface="Calibri"/>
               </a:rPr>
               <a:t>-</a:t>
             </a:r>
             <a:endParaRPr sz="1400" dirty="0">
+              <a:solidFill>
+                <a:srgbClr val="FF0000"/>
+              </a:solidFill>
               <a:latin typeface="Calibri"/>
               <a:cs typeface="Calibri"/>
             </a:endParaRPr>
@@ -9168,6 +9189,9 @@
             </a:pPr>
             <a:r>
               <a:rPr lang="en-US" sz="1400" dirty="0">
+                <a:solidFill>
+                  <a:srgbClr val="FF0000"/>
+                </a:solidFill>
                 <a:latin typeface="Calibri"/>
                 <a:cs typeface="Calibri"/>
               </a:rPr>
@@ -9175,13 +9199,19 @@
             </a:r>
             <a:r>
               <a:rPr lang="ru-RU" sz="1400" dirty="0">
+                <a:solidFill>
+                  <a:srgbClr val="FF0000"/>
+                </a:solidFill>
                 <a:latin typeface="Calibri"/>
                 <a:cs typeface="Calibri"/>
               </a:rPr>
-              <a:t>8</a:t>
+              <a:t>5</a:t>
             </a:r>
             <a:r>
               <a:rPr sz="1400" dirty="0">
+                <a:solidFill>
+                  <a:srgbClr val="FF0000"/>
+                </a:solidFill>
                 <a:latin typeface="Calibri"/>
                 <a:cs typeface="Calibri"/>
               </a:rPr>
@@ -9189,6 +9219,9 @@
             </a:r>
             <a:r>
               <a:rPr lang="en-US" sz="1400" dirty="0">
+                <a:solidFill>
+                  <a:srgbClr val="FF0000"/>
+                </a:solidFill>
                 <a:latin typeface="Calibri"/>
                 <a:cs typeface="Calibri"/>
               </a:rPr>
@@ -9196,13 +9229,19 @@
             </a:r>
             <a:r>
               <a:rPr lang="ru-RU" sz="1400" dirty="0">
+                <a:solidFill>
+                  <a:srgbClr val="FF0000"/>
+                </a:solidFill>
                 <a:latin typeface="Calibri"/>
                 <a:cs typeface="Calibri"/>
               </a:rPr>
-              <a:t>9</a:t>
+              <a:t>4</a:t>
             </a:r>
             <a:r>
               <a:rPr sz="1400" spc="-35" dirty="0">
+                <a:solidFill>
+                  <a:srgbClr val="FF0000"/>
+                </a:solidFill>
                 <a:latin typeface="Calibri"/>
                 <a:cs typeface="Calibri"/>
               </a:rPr>
@@ -9210,12 +9249,18 @@
             </a:r>
             <a:r>
               <a:rPr sz="1400" spc="-50" dirty="0">
+                <a:solidFill>
+                  <a:srgbClr val="FF0000"/>
+                </a:solidFill>
                 <a:latin typeface="Calibri"/>
                 <a:cs typeface="Calibri"/>
               </a:rPr>
               <a:t>-</a:t>
             </a:r>
             <a:endParaRPr sz="1400" dirty="0">
+              <a:solidFill>
+                <a:srgbClr val="FF0000"/>
+              </a:solidFill>
               <a:latin typeface="Calibri"/>
               <a:cs typeface="Calibri"/>
             </a:endParaRPr>
@@ -9259,13 +9304,19 @@
             </a:pPr>
             <a:r>
               <a:rPr lang="ru-RU" sz="1400" dirty="0">
+                <a:solidFill>
+                  <a:srgbClr val="FF0000"/>
+                </a:solidFill>
                 <a:latin typeface="Calibri"/>
                 <a:cs typeface="Calibri"/>
               </a:rPr>
-              <a:t>26</a:t>
+              <a:t>22</a:t>
             </a:r>
             <a:r>
               <a:rPr sz="1400" dirty="0">
+                <a:solidFill>
+                  <a:srgbClr val="FF0000"/>
+                </a:solidFill>
                 <a:latin typeface="Calibri"/>
                 <a:cs typeface="Calibri"/>
               </a:rPr>
@@ -9273,6 +9324,9 @@
             </a:r>
             <a:r>
               <a:rPr lang="en-US" sz="1400" dirty="0">
+                <a:solidFill>
+                  <a:srgbClr val="FF0000"/>
+                </a:solidFill>
                 <a:latin typeface="Calibri"/>
                 <a:cs typeface="Calibri"/>
               </a:rPr>
@@ -9280,13 +9334,19 @@
             </a:r>
             <a:r>
               <a:rPr lang="ru-RU" sz="1400" dirty="0">
+                <a:solidFill>
+                  <a:srgbClr val="FF0000"/>
+                </a:solidFill>
                 <a:latin typeface="Calibri"/>
                 <a:cs typeface="Calibri"/>
               </a:rPr>
-              <a:t>9</a:t>
+              <a:t>4</a:t>
             </a:r>
             <a:r>
               <a:rPr sz="1400" spc="-35" dirty="0">
+                <a:solidFill>
+                  <a:srgbClr val="FF0000"/>
+                </a:solidFill>
                 <a:latin typeface="Calibri"/>
                 <a:cs typeface="Calibri"/>
               </a:rPr>
@@ -9294,12 +9354,18 @@
             </a:r>
             <a:r>
               <a:rPr sz="1400" spc="-50" dirty="0">
+                <a:solidFill>
+                  <a:srgbClr val="FF0000"/>
+                </a:solidFill>
                 <a:latin typeface="Calibri"/>
                 <a:cs typeface="Calibri"/>
               </a:rPr>
               <a:t>-</a:t>
             </a:r>
             <a:endParaRPr sz="1400" dirty="0">
+              <a:solidFill>
+                <a:srgbClr val="FF0000"/>
+              </a:solidFill>
               <a:latin typeface="Calibri"/>
               <a:cs typeface="Calibri"/>
             </a:endParaRPr>
@@ -9965,7 +10031,7 @@
                 <a:latin typeface="Calibri"/>
                 <a:cs typeface="Calibri"/>
               </a:rPr>
-              <a:t>02</a:t>
+              <a:t>24</a:t>
             </a:r>
             <a:r>
               <a:rPr sz="1400" dirty="0">
@@ -9979,7 +10045,7 @@
                 <a:latin typeface="Calibri"/>
                 <a:cs typeface="Calibri"/>
               </a:rPr>
-              <a:t>10</a:t>
+              <a:t>04</a:t>
             </a:r>
             <a:r>
               <a:rPr sz="1400" spc="-35" dirty="0">
